--- a/Caso de la empresa Camposol.pptx
+++ b/Caso de la empresa Camposol.pptx
@@ -9,14 +9,15 @@
     <p:sldId id="257" r:id="rId3"/>
     <p:sldId id="258" r:id="rId4"/>
     <p:sldId id="262" r:id="rId5"/>
-    <p:sldId id="263" r:id="rId6"/>
-    <p:sldId id="265" r:id="rId7"/>
-    <p:sldId id="268" r:id="rId8"/>
-    <p:sldId id="271" r:id="rId9"/>
-    <p:sldId id="266" r:id="rId10"/>
-    <p:sldId id="270" r:id="rId11"/>
-    <p:sldId id="267" r:id="rId12"/>
-    <p:sldId id="269" r:id="rId13"/>
+    <p:sldId id="272" r:id="rId6"/>
+    <p:sldId id="263" r:id="rId7"/>
+    <p:sldId id="265" r:id="rId8"/>
+    <p:sldId id="268" r:id="rId9"/>
+    <p:sldId id="271" r:id="rId10"/>
+    <p:sldId id="266" r:id="rId11"/>
+    <p:sldId id="270" r:id="rId12"/>
+    <p:sldId id="267" r:id="rId13"/>
+    <p:sldId id="269" r:id="rId14"/>
   </p:sldIdLst>
   <p:sldSz cx="12192000" cy="6858000"/>
   <p:notesSz cx="6858000" cy="9144000"/>
@@ -4071,7 +4072,7 @@
           <p:cNvPr id="2" name="Título 1">
             <a:extLst>
               <a:ext uri="{FF2B5EF4-FFF2-40B4-BE49-F238E27FC236}">
-                <a16:creationId xmlns:a16="http://schemas.microsoft.com/office/drawing/2014/main" id="{1FD1D686-DE3B-BDD8-78AF-BFAC171F35D5}"/>
+                <a16:creationId xmlns:a16="http://schemas.microsoft.com/office/drawing/2014/main" id="{B1303390-2115-5FCF-D273-60075D577EC5}"/>
               </a:ext>
             </a:extLst>
           </p:cNvPr>
@@ -4083,33 +4084,91 @@
           </p:nvPr>
         </p:nvSpPr>
         <p:spPr/>
+        <p:txBody>
+          <a:bodyPr>
+            <a:normAutofit fontScale="90000"/>
+          </a:bodyPr>
+          <a:lstStyle/>
+          <a:p>
+            <a:r>
+              <a:rPr lang="es-PE" dirty="0"/>
+              <a:t>Ejemplo de consultas realizadas en la base de datos</a:t>
+            </a:r>
+          </a:p>
+        </p:txBody>
+      </p:sp>
+      <p:sp>
+        <p:nvSpPr>
+          <p:cNvPr id="3" name="Marcador de texto 2">
+            <a:extLst>
+              <a:ext uri="{FF2B5EF4-FFF2-40B4-BE49-F238E27FC236}">
+                <a16:creationId xmlns:a16="http://schemas.microsoft.com/office/drawing/2014/main" id="{41B6E8A9-AC78-69E3-F7EF-EBA8CD86C3DB}"/>
+              </a:ext>
+            </a:extLst>
+          </p:cNvPr>
+          <p:cNvSpPr>
+            <a:spLocks noGrp="1"/>
+          </p:cNvSpPr>
+          <p:nvPr>
+            <p:ph type="body" idx="1"/>
+          </p:nvPr>
+        </p:nvSpPr>
+        <p:spPr>
+          <a:xfrm>
+            <a:off x="704087" y="2085150"/>
+            <a:ext cx="5212080" cy="657225"/>
+          </a:xfrm>
+        </p:spPr>
         <p:txBody>
           <a:bodyPr/>
           <a:lstStyle/>
           <a:p>
-            <a:pPr algn="ctr"/>
-            <a:r>
-              <a:rPr lang="es-PE" dirty="0" err="1"/>
-              <a:t>Inner</a:t>
-            </a:r>
             <a:r>
               <a:rPr lang="es-PE" dirty="0"/>
-              <a:t> </a:t>
-            </a:r>
-            <a:r>
-              <a:rPr lang="es-PE" dirty="0" err="1"/>
-              <a:t>Join</a:t>
-            </a:r>
-            <a:endParaRPr lang="es-PE" dirty="0"/>
+              <a:t>Consultas</a:t>
+            </a:r>
+          </a:p>
+        </p:txBody>
+      </p:sp>
+      <p:sp>
+        <p:nvSpPr>
+          <p:cNvPr id="5" name="Marcador de texto 4">
+            <a:extLst>
+              <a:ext uri="{FF2B5EF4-FFF2-40B4-BE49-F238E27FC236}">
+                <a16:creationId xmlns:a16="http://schemas.microsoft.com/office/drawing/2014/main" id="{0FA94A5A-0448-A170-98B5-293618846FA5}"/>
+              </a:ext>
+            </a:extLst>
+          </p:cNvPr>
+          <p:cNvSpPr>
+            <a:spLocks noGrp="1"/>
+          </p:cNvSpPr>
+          <p:nvPr>
+            <p:ph type="body" sz="quarter" idx="3"/>
+          </p:nvPr>
+        </p:nvSpPr>
+        <p:spPr>
+          <a:xfrm>
+            <a:off x="6181343" y="2085150"/>
+            <a:ext cx="5212080" cy="657225"/>
+          </a:xfrm>
+        </p:spPr>
+        <p:txBody>
+          <a:bodyPr/>
+          <a:lstStyle/>
+          <a:p>
+            <a:r>
+              <a:rPr lang="es-PE" dirty="0"/>
+              <a:t>Subconsultas</a:t>
+            </a:r>
           </a:p>
         </p:txBody>
       </p:sp>
       <p:pic>
         <p:nvPicPr>
-          <p:cNvPr id="12" name="Picture 1">
-            <a:extLst>
-              <a:ext uri="{FF2B5EF4-FFF2-40B4-BE49-F238E27FC236}">
-                <a16:creationId xmlns:a16="http://schemas.microsoft.com/office/drawing/2014/main" id="{8A0D84BE-03B9-B21F-0C1F-DCFC9734E8D2}"/>
+          <p:cNvPr id="7" name="Picture 1">
+            <a:extLst>
+              <a:ext uri="{FF2B5EF4-FFF2-40B4-BE49-F238E27FC236}">
+                <a16:creationId xmlns:a16="http://schemas.microsoft.com/office/drawing/2014/main" id="{0A64C625-E77C-8CA4-A64B-96A4D0975278}"/>
               </a:ext>
             </a:extLst>
           </p:cNvPr>
@@ -4117,7 +4176,7 @@
             <a:picLocks noGrp="1" noChangeAspect="1"/>
           </p:cNvPicPr>
           <p:nvPr>
-            <p:ph idx="1"/>
+            <p:ph sz="half" idx="2"/>
           </p:nvPr>
         </p:nvPicPr>
         <p:blipFill>
@@ -4128,71 +4187,20 @@
         </p:blipFill>
         <p:spPr>
           <a:xfrm>
-            <a:off x="966258" y="1487241"/>
-            <a:ext cx="2716005" cy="3883518"/>
+            <a:off x="704087" y="2758144"/>
+            <a:ext cx="5211763" cy="1357482"/>
           </a:xfrm>
           <a:prstGeom prst="rect">
             <a:avLst/>
           </a:prstGeom>
         </p:spPr>
       </p:pic>
-      <p:sp>
-        <p:nvSpPr>
-          <p:cNvPr id="5" name="CuadroTexto 4">
-            <a:extLst>
-              <a:ext uri="{FF2B5EF4-FFF2-40B4-BE49-F238E27FC236}">
-                <a16:creationId xmlns:a16="http://schemas.microsoft.com/office/drawing/2014/main" id="{B50F600F-3093-DF40-7C3F-EF39D70C4E51}"/>
-              </a:ext>
-            </a:extLst>
-          </p:cNvPr>
-          <p:cNvSpPr txBox="1"/>
-          <p:nvPr/>
-        </p:nvSpPr>
-        <p:spPr>
-          <a:xfrm>
-            <a:off x="3947886" y="1923840"/>
-            <a:ext cx="7286753" cy="1200329"/>
-          </a:xfrm>
-          <a:prstGeom prst="rect">
-            <a:avLst/>
-          </a:prstGeom>
-          <a:noFill/>
-        </p:spPr>
-        <p:txBody>
-          <a:bodyPr wrap="square" rtlCol="0">
-            <a:spAutoFit/>
-          </a:bodyPr>
-          <a:lstStyle/>
-          <a:p>
-            <a:r>
-              <a:rPr lang="es-PE" dirty="0"/>
-              <a:t>En nuestro caso, el uso del </a:t>
-            </a:r>
-            <a:r>
-              <a:rPr lang="es-PE" dirty="0" err="1"/>
-              <a:t>inner</a:t>
-            </a:r>
-            <a:r>
-              <a:rPr lang="es-PE" dirty="0"/>
-              <a:t> </a:t>
-            </a:r>
-            <a:r>
-              <a:rPr lang="es-PE" dirty="0" err="1"/>
-              <a:t>join</a:t>
-            </a:r>
-            <a:r>
-              <a:rPr lang="es-PE" dirty="0"/>
-              <a:t> fue ejecutado con el propósito de poder verificar la conexión entre todas las tablas principales, lanzándonos los datos que se usan como referencia en cada una de las tablas mediante las llaves foráneas, esto nos generara la siguiente tabla: </a:t>
-            </a:r>
-          </a:p>
-        </p:txBody>
-      </p:sp>
       <p:pic>
         <p:nvPicPr>
-          <p:cNvPr id="7" name="Imagen 6">
-            <a:extLst>
-              <a:ext uri="{FF2B5EF4-FFF2-40B4-BE49-F238E27FC236}">
-                <a16:creationId xmlns:a16="http://schemas.microsoft.com/office/drawing/2014/main" id="{32CC93F5-7D5F-12F3-40EB-CCB0FFF3C2D8}"/>
+          <p:cNvPr id="9" name="Picture 1">
+            <a:extLst>
+              <a:ext uri="{FF2B5EF4-FFF2-40B4-BE49-F238E27FC236}">
+                <a16:creationId xmlns:a16="http://schemas.microsoft.com/office/drawing/2014/main" id="{66E86224-1673-BBBC-B09E-E9538AB8200E}"/>
               </a:ext>
             </a:extLst>
           </p:cNvPr>
@@ -4209,8 +4217,68 @@
         </p:blipFill>
         <p:spPr>
           <a:xfrm>
-            <a:off x="4161783" y="3429000"/>
-            <a:ext cx="6858957" cy="1552792"/>
+            <a:off x="704087" y="4235988"/>
+            <a:ext cx="4467225" cy="609600"/>
+          </a:xfrm>
+          <a:prstGeom prst="rect">
+            <a:avLst/>
+          </a:prstGeom>
+        </p:spPr>
+      </p:pic>
+      <p:pic>
+        <p:nvPicPr>
+          <p:cNvPr id="11" name="Picture 1">
+            <a:extLst>
+              <a:ext uri="{FF2B5EF4-FFF2-40B4-BE49-F238E27FC236}">
+                <a16:creationId xmlns:a16="http://schemas.microsoft.com/office/drawing/2014/main" id="{694BFC44-4C9E-D9B8-0259-A10E9E7EEEE6}"/>
+              </a:ext>
+            </a:extLst>
+          </p:cNvPr>
+          <p:cNvPicPr>
+            <a:picLocks noChangeAspect="1"/>
+          </p:cNvPicPr>
+          <p:nvPr/>
+        </p:nvPicPr>
+        <p:blipFill>
+          <a:blip r:embed="rId4"/>
+          <a:stretch>
+            <a:fillRect/>
+          </a:stretch>
+        </p:blipFill>
+        <p:spPr>
+          <a:xfrm>
+            <a:off x="6181343" y="2781474"/>
+            <a:ext cx="5400040" cy="636905"/>
+          </a:xfrm>
+          <a:prstGeom prst="rect">
+            <a:avLst/>
+          </a:prstGeom>
+        </p:spPr>
+      </p:pic>
+      <p:pic>
+        <p:nvPicPr>
+          <p:cNvPr id="16" name="Imagen 15">
+            <a:extLst>
+              <a:ext uri="{FF2B5EF4-FFF2-40B4-BE49-F238E27FC236}">
+                <a16:creationId xmlns:a16="http://schemas.microsoft.com/office/drawing/2014/main" id="{E6504FCE-9A14-782F-BF23-BB9743DC4930}"/>
+              </a:ext>
+            </a:extLst>
+          </p:cNvPr>
+          <p:cNvPicPr>
+            <a:picLocks noChangeAspect="1"/>
+          </p:cNvPicPr>
+          <p:nvPr/>
+        </p:nvPicPr>
+        <p:blipFill>
+          <a:blip r:embed="rId5"/>
+          <a:stretch>
+            <a:fillRect/>
+          </a:stretch>
+        </p:blipFill>
+        <p:spPr>
+          <a:xfrm>
+            <a:off x="6181343" y="3796251"/>
+            <a:ext cx="5211763" cy="744537"/>
           </a:xfrm>
           <a:prstGeom prst="rect">
             <a:avLst/>
@@ -4220,7 +4288,7 @@
     </p:spTree>
     <p:extLst>
       <p:ext uri="{BB962C8B-B14F-4D97-AF65-F5344CB8AC3E}">
-        <p14:creationId xmlns:p14="http://schemas.microsoft.com/office/powerpoint/2010/main" val="2457799297"/>
+        <p14:creationId xmlns:p14="http://schemas.microsoft.com/office/powerpoint/2010/main" val="1405469835"/>
       </p:ext>
     </p:extLst>
   </p:cSld>
@@ -4233,39 +4301,6 @@
 <file path=ppt/slides/slide11.xml><?xml version="1.0" encoding="utf-8"?>
 <p:sld xmlns:a="http://schemas.openxmlformats.org/drawingml/2006/main" xmlns:r="http://schemas.openxmlformats.org/officeDocument/2006/relationships" xmlns:p="http://schemas.openxmlformats.org/presentationml/2006/main">
   <p:cSld>
-    <p:bg>
-      <p:bgPr>
-        <a:gradFill>
-          <a:gsLst>
-            <a:gs pos="0">
-              <a:schemeClr val="bg2">
-                <a:lumMod val="75000"/>
-              </a:schemeClr>
-            </a:gs>
-            <a:gs pos="74000">
-              <a:schemeClr val="accent1">
-                <a:lumMod val="45000"/>
-                <a:lumOff val="55000"/>
-              </a:schemeClr>
-            </a:gs>
-            <a:gs pos="83000">
-              <a:schemeClr val="accent1">
-                <a:lumMod val="45000"/>
-                <a:lumOff val="55000"/>
-              </a:schemeClr>
-            </a:gs>
-            <a:gs pos="100000">
-              <a:schemeClr val="tx1">
-                <a:lumMod val="95000"/>
-                <a:lumOff val="5000"/>
-              </a:schemeClr>
-            </a:gs>
-          </a:gsLst>
-          <a:lin ang="5400000" scaled="1"/>
-        </a:gradFill>
-        <a:effectLst/>
-      </p:bgPr>
-    </p:bg>
     <p:spTree>
       <p:nvGrpSpPr>
         <p:cNvPr id="1" name=""/>
@@ -4285,7 +4320,7 @@
           <p:cNvPr id="2" name="Título 1">
             <a:extLst>
               <a:ext uri="{FF2B5EF4-FFF2-40B4-BE49-F238E27FC236}">
-                <a16:creationId xmlns:a16="http://schemas.microsoft.com/office/drawing/2014/main" id="{2EA47400-3800-4BAA-8D27-F84FF8B5EF35}"/>
+                <a16:creationId xmlns:a16="http://schemas.microsoft.com/office/drawing/2014/main" id="{1FD1D686-DE3B-BDD8-78AF-BFAC171F35D5}"/>
               </a:ext>
             </a:extLst>
           </p:cNvPr>
@@ -4301,91 +4336,29 @@
           <a:bodyPr/>
           <a:lstStyle/>
           <a:p>
+            <a:pPr algn="ctr"/>
+            <a:r>
+              <a:rPr lang="es-PE" dirty="0" err="1"/>
+              <a:t>Inner</a:t>
+            </a:r>
             <a:r>
               <a:rPr lang="es-PE" dirty="0"/>
-              <a:t>Resultados</a:t>
-            </a:r>
-          </a:p>
-        </p:txBody>
-      </p:sp>
-      <p:sp>
-        <p:nvSpPr>
-          <p:cNvPr id="3" name="Marcador de texto 2">
-            <a:extLst>
-              <a:ext uri="{FF2B5EF4-FFF2-40B4-BE49-F238E27FC236}">
-                <a16:creationId xmlns:a16="http://schemas.microsoft.com/office/drawing/2014/main" id="{CB1C210D-C1E7-5336-0987-0108C302A9CE}"/>
-              </a:ext>
-            </a:extLst>
-          </p:cNvPr>
-          <p:cNvSpPr>
-            <a:spLocks noGrp="1"/>
-          </p:cNvSpPr>
-          <p:nvPr>
-            <p:ph type="body" idx="1"/>
-          </p:nvPr>
-        </p:nvSpPr>
-        <p:spPr>
-          <a:xfrm>
-            <a:off x="704088" y="1756538"/>
-            <a:ext cx="5212080" cy="323107"/>
-          </a:xfrm>
-        </p:spPr>
-        <p:txBody>
-          <a:bodyPr>
-            <a:normAutofit fontScale="92500" lnSpcReduction="10000"/>
-          </a:bodyPr>
-          <a:lstStyle/>
-          <a:p>
-            <a:pPr algn="ctr"/>
-            <a:r>
-              <a:rPr lang="es-PE" dirty="0"/>
-              <a:t>Consultas</a:t>
-            </a:r>
-          </a:p>
-        </p:txBody>
-      </p:sp>
-      <p:sp>
-        <p:nvSpPr>
-          <p:cNvPr id="5" name="Marcador de texto 4">
-            <a:extLst>
-              <a:ext uri="{FF2B5EF4-FFF2-40B4-BE49-F238E27FC236}">
-                <a16:creationId xmlns:a16="http://schemas.microsoft.com/office/drawing/2014/main" id="{9C594D54-E251-F333-360C-62498F2357FF}"/>
-              </a:ext>
-            </a:extLst>
-          </p:cNvPr>
-          <p:cNvSpPr>
-            <a:spLocks noGrp="1"/>
-          </p:cNvSpPr>
-          <p:nvPr>
-            <p:ph type="body" sz="quarter" idx="3"/>
-          </p:nvPr>
-        </p:nvSpPr>
-        <p:spPr>
-          <a:xfrm>
-            <a:off x="6181344" y="1756538"/>
-            <a:ext cx="5212080" cy="323107"/>
-          </a:xfrm>
-        </p:spPr>
-        <p:txBody>
-          <a:bodyPr>
-            <a:normAutofit fontScale="92500" lnSpcReduction="10000"/>
-          </a:bodyPr>
-          <a:lstStyle/>
-          <a:p>
-            <a:pPr algn="ctr"/>
-            <a:r>
-              <a:rPr lang="es-PE" dirty="0"/>
-              <a:t>Subconsultas</a:t>
-            </a:r>
+              <a:t> </a:t>
+            </a:r>
+            <a:r>
+              <a:rPr lang="es-PE" dirty="0" err="1"/>
+              <a:t>Join</a:t>
+            </a:r>
+            <a:endParaRPr lang="es-PE" dirty="0"/>
           </a:p>
         </p:txBody>
       </p:sp>
       <p:pic>
         <p:nvPicPr>
-          <p:cNvPr id="8" name="Marcador de contenido 7">
-            <a:extLst>
-              <a:ext uri="{FF2B5EF4-FFF2-40B4-BE49-F238E27FC236}">
-                <a16:creationId xmlns:a16="http://schemas.microsoft.com/office/drawing/2014/main" id="{608DF2B1-09E4-751B-84B2-66F9CCE989AF}"/>
+          <p:cNvPr id="12" name="Picture 1">
+            <a:extLst>
+              <a:ext uri="{FF2B5EF4-FFF2-40B4-BE49-F238E27FC236}">
+                <a16:creationId xmlns:a16="http://schemas.microsoft.com/office/drawing/2014/main" id="{8A0D84BE-03B9-B21F-0C1F-DCFC9734E8D2}"/>
               </a:ext>
             </a:extLst>
           </p:cNvPr>
@@ -4393,7 +4366,7 @@
             <a:picLocks noGrp="1" noChangeAspect="1"/>
           </p:cNvPicPr>
           <p:nvPr>
-            <p:ph sz="quarter" idx="4"/>
+            <p:ph idx="1"/>
           </p:nvPr>
         </p:nvPicPr>
         <p:blipFill>
@@ -4404,20 +4377,71 @@
         </p:blipFill>
         <p:spPr>
           <a:xfrm>
-            <a:off x="6181660" y="2249852"/>
-            <a:ext cx="5211763" cy="595170"/>
+            <a:off x="966258" y="1487241"/>
+            <a:ext cx="2716005" cy="3883518"/>
           </a:xfrm>
           <a:prstGeom prst="rect">
             <a:avLst/>
           </a:prstGeom>
         </p:spPr>
       </p:pic>
+      <p:sp>
+        <p:nvSpPr>
+          <p:cNvPr id="5" name="CuadroTexto 4">
+            <a:extLst>
+              <a:ext uri="{FF2B5EF4-FFF2-40B4-BE49-F238E27FC236}">
+                <a16:creationId xmlns:a16="http://schemas.microsoft.com/office/drawing/2014/main" id="{B50F600F-3093-DF40-7C3F-EF39D70C4E51}"/>
+              </a:ext>
+            </a:extLst>
+          </p:cNvPr>
+          <p:cNvSpPr txBox="1"/>
+          <p:nvPr/>
+        </p:nvSpPr>
+        <p:spPr>
+          <a:xfrm>
+            <a:off x="3947886" y="1923840"/>
+            <a:ext cx="7286753" cy="1200329"/>
+          </a:xfrm>
+          <a:prstGeom prst="rect">
+            <a:avLst/>
+          </a:prstGeom>
+          <a:noFill/>
+        </p:spPr>
+        <p:txBody>
+          <a:bodyPr wrap="square" rtlCol="0">
+            <a:spAutoFit/>
+          </a:bodyPr>
+          <a:lstStyle/>
+          <a:p>
+            <a:r>
+              <a:rPr lang="es-PE" dirty="0"/>
+              <a:t>En nuestro caso, el uso del </a:t>
+            </a:r>
+            <a:r>
+              <a:rPr lang="es-PE" dirty="0" err="1"/>
+              <a:t>inner</a:t>
+            </a:r>
+            <a:r>
+              <a:rPr lang="es-PE" dirty="0"/>
+              <a:t> </a:t>
+            </a:r>
+            <a:r>
+              <a:rPr lang="es-PE" dirty="0" err="1"/>
+              <a:t>join</a:t>
+            </a:r>
+            <a:r>
+              <a:rPr lang="es-PE" dirty="0"/>
+              <a:t> fue ejecutado con el propósito de poder verificar la conexión entre todas las tablas principales, lanzándonos los datos que se usan como referencia en cada una de las tablas mediante las llaves foráneas, esto nos generara la siguiente tabla: </a:t>
+            </a:r>
+          </a:p>
+        </p:txBody>
+      </p:sp>
       <p:pic>
         <p:nvPicPr>
-          <p:cNvPr id="10" name="Imagen 9">
-            <a:extLst>
-              <a:ext uri="{FF2B5EF4-FFF2-40B4-BE49-F238E27FC236}">
-                <a16:creationId xmlns:a16="http://schemas.microsoft.com/office/drawing/2014/main" id="{003079CE-3414-5D9B-21F6-0B262567CAE7}"/>
+          <p:cNvPr id="7" name="Imagen 6">
+            <a:extLst>
+              <a:ext uri="{FF2B5EF4-FFF2-40B4-BE49-F238E27FC236}">
+                <a16:creationId xmlns:a16="http://schemas.microsoft.com/office/drawing/2014/main" id="{32CC93F5-7D5F-12F3-40EB-CCB0FFF3C2D8}"/>
               </a:ext>
             </a:extLst>
           </p:cNvPr>
@@ -4434,70 +4458,8 @@
         </p:blipFill>
         <p:spPr>
           <a:xfrm>
-            <a:off x="7106558" y="3067424"/>
-            <a:ext cx="3361652" cy="2134082"/>
-          </a:xfrm>
-          <a:prstGeom prst="rect">
-            <a:avLst/>
-          </a:prstGeom>
-        </p:spPr>
-      </p:pic>
-      <p:pic>
-        <p:nvPicPr>
-          <p:cNvPr id="11" name="Picture 1">
-            <a:extLst>
-              <a:ext uri="{FF2B5EF4-FFF2-40B4-BE49-F238E27FC236}">
-                <a16:creationId xmlns:a16="http://schemas.microsoft.com/office/drawing/2014/main" id="{6FDED78D-BB1F-37C8-FFAE-60A2DFDBDDCB}"/>
-              </a:ext>
-            </a:extLst>
-          </p:cNvPr>
-          <p:cNvPicPr>
-            <a:picLocks noGrp="1" noChangeAspect="1"/>
-          </p:cNvPicPr>
-          <p:nvPr>
-            <p:ph sz="half" idx="2"/>
-          </p:nvPr>
-        </p:nvPicPr>
-        <p:blipFill>
-          <a:blip r:embed="rId4"/>
-          <a:stretch>
-            <a:fillRect/>
-          </a:stretch>
-        </p:blipFill>
-        <p:spPr>
-          <a:xfrm>
-            <a:off x="704087" y="2170203"/>
-            <a:ext cx="5211763" cy="2234461"/>
-          </a:xfrm>
-          <a:prstGeom prst="rect">
-            <a:avLst/>
-          </a:prstGeom>
-        </p:spPr>
-      </p:pic>
-      <p:pic>
-        <p:nvPicPr>
-          <p:cNvPr id="12" name="Picture 1">
-            <a:extLst>
-              <a:ext uri="{FF2B5EF4-FFF2-40B4-BE49-F238E27FC236}">
-                <a16:creationId xmlns:a16="http://schemas.microsoft.com/office/drawing/2014/main" id="{89427B73-1378-3C9D-D9FA-EF3D425DBC1C}"/>
-              </a:ext>
-            </a:extLst>
-          </p:cNvPr>
-          <p:cNvPicPr>
-            <a:picLocks noChangeAspect="1"/>
-          </p:cNvPicPr>
-          <p:nvPr/>
-        </p:nvPicPr>
-        <p:blipFill>
-          <a:blip r:embed="rId5"/>
-          <a:stretch>
-            <a:fillRect/>
-          </a:stretch>
-        </p:blipFill>
-        <p:spPr>
-          <a:xfrm>
-            <a:off x="516128" y="4557616"/>
-            <a:ext cx="5400040" cy="1287780"/>
+            <a:off x="4161783" y="3429000"/>
+            <a:ext cx="6858957" cy="1552792"/>
           </a:xfrm>
           <a:prstGeom prst="rect">
             <a:avLst/>
@@ -4507,7 +4469,7 @@
     </p:spTree>
     <p:extLst>
       <p:ext uri="{BB962C8B-B14F-4D97-AF65-F5344CB8AC3E}">
-        <p14:creationId xmlns:p14="http://schemas.microsoft.com/office/powerpoint/2010/main" val="1579303384"/>
+        <p14:creationId xmlns:p14="http://schemas.microsoft.com/office/powerpoint/2010/main" val="2457799297"/>
       </p:ext>
     </p:extLst>
   </p:cSld>
@@ -4572,6 +4534,293 @@
           <p:cNvPr id="2" name="Título 1">
             <a:extLst>
               <a:ext uri="{FF2B5EF4-FFF2-40B4-BE49-F238E27FC236}">
+                <a16:creationId xmlns:a16="http://schemas.microsoft.com/office/drawing/2014/main" id="{2EA47400-3800-4BAA-8D27-F84FF8B5EF35}"/>
+              </a:ext>
+            </a:extLst>
+          </p:cNvPr>
+          <p:cNvSpPr>
+            <a:spLocks noGrp="1"/>
+          </p:cNvSpPr>
+          <p:nvPr>
+            <p:ph type="title"/>
+          </p:nvPr>
+        </p:nvSpPr>
+        <p:spPr/>
+        <p:txBody>
+          <a:bodyPr/>
+          <a:lstStyle/>
+          <a:p>
+            <a:r>
+              <a:rPr lang="es-PE" dirty="0"/>
+              <a:t>Resultados</a:t>
+            </a:r>
+          </a:p>
+        </p:txBody>
+      </p:sp>
+      <p:sp>
+        <p:nvSpPr>
+          <p:cNvPr id="3" name="Marcador de texto 2">
+            <a:extLst>
+              <a:ext uri="{FF2B5EF4-FFF2-40B4-BE49-F238E27FC236}">
+                <a16:creationId xmlns:a16="http://schemas.microsoft.com/office/drawing/2014/main" id="{CB1C210D-C1E7-5336-0987-0108C302A9CE}"/>
+              </a:ext>
+            </a:extLst>
+          </p:cNvPr>
+          <p:cNvSpPr>
+            <a:spLocks noGrp="1"/>
+          </p:cNvSpPr>
+          <p:nvPr>
+            <p:ph type="body" idx="1"/>
+          </p:nvPr>
+        </p:nvSpPr>
+        <p:spPr>
+          <a:xfrm>
+            <a:off x="704088" y="1756538"/>
+            <a:ext cx="5212080" cy="323107"/>
+          </a:xfrm>
+        </p:spPr>
+        <p:txBody>
+          <a:bodyPr>
+            <a:normAutofit fontScale="92500" lnSpcReduction="10000"/>
+          </a:bodyPr>
+          <a:lstStyle/>
+          <a:p>
+            <a:pPr algn="ctr"/>
+            <a:r>
+              <a:rPr lang="es-PE" dirty="0"/>
+              <a:t>Consultas</a:t>
+            </a:r>
+          </a:p>
+        </p:txBody>
+      </p:sp>
+      <p:sp>
+        <p:nvSpPr>
+          <p:cNvPr id="5" name="Marcador de texto 4">
+            <a:extLst>
+              <a:ext uri="{FF2B5EF4-FFF2-40B4-BE49-F238E27FC236}">
+                <a16:creationId xmlns:a16="http://schemas.microsoft.com/office/drawing/2014/main" id="{9C594D54-E251-F333-360C-62498F2357FF}"/>
+              </a:ext>
+            </a:extLst>
+          </p:cNvPr>
+          <p:cNvSpPr>
+            <a:spLocks noGrp="1"/>
+          </p:cNvSpPr>
+          <p:nvPr>
+            <p:ph type="body" sz="quarter" idx="3"/>
+          </p:nvPr>
+        </p:nvSpPr>
+        <p:spPr>
+          <a:xfrm>
+            <a:off x="6181344" y="1756538"/>
+            <a:ext cx="5212080" cy="323107"/>
+          </a:xfrm>
+        </p:spPr>
+        <p:txBody>
+          <a:bodyPr>
+            <a:normAutofit fontScale="92500" lnSpcReduction="10000"/>
+          </a:bodyPr>
+          <a:lstStyle/>
+          <a:p>
+            <a:pPr algn="ctr"/>
+            <a:r>
+              <a:rPr lang="es-PE" dirty="0"/>
+              <a:t>Subconsultas</a:t>
+            </a:r>
+          </a:p>
+        </p:txBody>
+      </p:sp>
+      <p:pic>
+        <p:nvPicPr>
+          <p:cNvPr id="8" name="Marcador de contenido 7">
+            <a:extLst>
+              <a:ext uri="{FF2B5EF4-FFF2-40B4-BE49-F238E27FC236}">
+                <a16:creationId xmlns:a16="http://schemas.microsoft.com/office/drawing/2014/main" id="{608DF2B1-09E4-751B-84B2-66F9CCE989AF}"/>
+              </a:ext>
+            </a:extLst>
+          </p:cNvPr>
+          <p:cNvPicPr>
+            <a:picLocks noGrp="1" noChangeAspect="1"/>
+          </p:cNvPicPr>
+          <p:nvPr>
+            <p:ph sz="quarter" idx="4"/>
+          </p:nvPr>
+        </p:nvPicPr>
+        <p:blipFill>
+          <a:blip r:embed="rId2"/>
+          <a:stretch>
+            <a:fillRect/>
+          </a:stretch>
+        </p:blipFill>
+        <p:spPr>
+          <a:xfrm>
+            <a:off x="6181660" y="2249852"/>
+            <a:ext cx="5211763" cy="595170"/>
+          </a:xfrm>
+          <a:prstGeom prst="rect">
+            <a:avLst/>
+          </a:prstGeom>
+        </p:spPr>
+      </p:pic>
+      <p:pic>
+        <p:nvPicPr>
+          <p:cNvPr id="10" name="Imagen 9">
+            <a:extLst>
+              <a:ext uri="{FF2B5EF4-FFF2-40B4-BE49-F238E27FC236}">
+                <a16:creationId xmlns:a16="http://schemas.microsoft.com/office/drawing/2014/main" id="{003079CE-3414-5D9B-21F6-0B262567CAE7}"/>
+              </a:ext>
+            </a:extLst>
+          </p:cNvPr>
+          <p:cNvPicPr>
+            <a:picLocks noChangeAspect="1"/>
+          </p:cNvPicPr>
+          <p:nvPr/>
+        </p:nvPicPr>
+        <p:blipFill>
+          <a:blip r:embed="rId3"/>
+          <a:stretch>
+            <a:fillRect/>
+          </a:stretch>
+        </p:blipFill>
+        <p:spPr>
+          <a:xfrm>
+            <a:off x="7106558" y="3067424"/>
+            <a:ext cx="3361652" cy="2134082"/>
+          </a:xfrm>
+          <a:prstGeom prst="rect">
+            <a:avLst/>
+          </a:prstGeom>
+        </p:spPr>
+      </p:pic>
+      <p:pic>
+        <p:nvPicPr>
+          <p:cNvPr id="11" name="Picture 1">
+            <a:extLst>
+              <a:ext uri="{FF2B5EF4-FFF2-40B4-BE49-F238E27FC236}">
+                <a16:creationId xmlns:a16="http://schemas.microsoft.com/office/drawing/2014/main" id="{6FDED78D-BB1F-37C8-FFAE-60A2DFDBDDCB}"/>
+              </a:ext>
+            </a:extLst>
+          </p:cNvPr>
+          <p:cNvPicPr>
+            <a:picLocks noGrp="1" noChangeAspect="1"/>
+          </p:cNvPicPr>
+          <p:nvPr>
+            <p:ph sz="half" idx="2"/>
+          </p:nvPr>
+        </p:nvPicPr>
+        <p:blipFill>
+          <a:blip r:embed="rId4"/>
+          <a:stretch>
+            <a:fillRect/>
+          </a:stretch>
+        </p:blipFill>
+        <p:spPr>
+          <a:xfrm>
+            <a:off x="704087" y="2170203"/>
+            <a:ext cx="5211763" cy="2234461"/>
+          </a:xfrm>
+          <a:prstGeom prst="rect">
+            <a:avLst/>
+          </a:prstGeom>
+        </p:spPr>
+      </p:pic>
+      <p:pic>
+        <p:nvPicPr>
+          <p:cNvPr id="12" name="Picture 1">
+            <a:extLst>
+              <a:ext uri="{FF2B5EF4-FFF2-40B4-BE49-F238E27FC236}">
+                <a16:creationId xmlns:a16="http://schemas.microsoft.com/office/drawing/2014/main" id="{89427B73-1378-3C9D-D9FA-EF3D425DBC1C}"/>
+              </a:ext>
+            </a:extLst>
+          </p:cNvPr>
+          <p:cNvPicPr>
+            <a:picLocks noChangeAspect="1"/>
+          </p:cNvPicPr>
+          <p:nvPr/>
+        </p:nvPicPr>
+        <p:blipFill>
+          <a:blip r:embed="rId5"/>
+          <a:stretch>
+            <a:fillRect/>
+          </a:stretch>
+        </p:blipFill>
+        <p:spPr>
+          <a:xfrm>
+            <a:off x="516128" y="4557616"/>
+            <a:ext cx="5400040" cy="1287780"/>
+          </a:xfrm>
+          <a:prstGeom prst="rect">
+            <a:avLst/>
+          </a:prstGeom>
+        </p:spPr>
+      </p:pic>
+    </p:spTree>
+    <p:extLst>
+      <p:ext uri="{BB962C8B-B14F-4D97-AF65-F5344CB8AC3E}">
+        <p14:creationId xmlns:p14="http://schemas.microsoft.com/office/powerpoint/2010/main" val="1579303384"/>
+      </p:ext>
+    </p:extLst>
+  </p:cSld>
+  <p:clrMapOvr>
+    <a:masterClrMapping/>
+  </p:clrMapOvr>
+</p:sld>
+</file>
+
+<file path=ppt/slides/slide13.xml><?xml version="1.0" encoding="utf-8"?>
+<p:sld xmlns:a="http://schemas.openxmlformats.org/drawingml/2006/main" xmlns:r="http://schemas.openxmlformats.org/officeDocument/2006/relationships" xmlns:p="http://schemas.openxmlformats.org/presentationml/2006/main">
+  <p:cSld>
+    <p:bg>
+      <p:bgPr>
+        <a:gradFill>
+          <a:gsLst>
+            <a:gs pos="0">
+              <a:schemeClr val="bg2">
+                <a:lumMod val="75000"/>
+              </a:schemeClr>
+            </a:gs>
+            <a:gs pos="74000">
+              <a:schemeClr val="accent1">
+                <a:lumMod val="45000"/>
+                <a:lumOff val="55000"/>
+              </a:schemeClr>
+            </a:gs>
+            <a:gs pos="83000">
+              <a:schemeClr val="accent1">
+                <a:lumMod val="45000"/>
+                <a:lumOff val="55000"/>
+              </a:schemeClr>
+            </a:gs>
+            <a:gs pos="100000">
+              <a:schemeClr val="tx1">
+                <a:lumMod val="95000"/>
+                <a:lumOff val="5000"/>
+              </a:schemeClr>
+            </a:gs>
+          </a:gsLst>
+          <a:lin ang="5400000" scaled="1"/>
+        </a:gradFill>
+        <a:effectLst/>
+      </p:bgPr>
+    </p:bg>
+    <p:spTree>
+      <p:nvGrpSpPr>
+        <p:cNvPr id="1" name=""/>
+        <p:cNvGrpSpPr/>
+        <p:nvPr/>
+      </p:nvGrpSpPr>
+      <p:grpSpPr>
+        <a:xfrm>
+          <a:off x="0" y="0"/>
+          <a:ext cx="0" cy="0"/>
+          <a:chOff x="0" y="0"/>
+          <a:chExt cx="0" cy="0"/>
+        </a:xfrm>
+      </p:grpSpPr>
+      <p:sp>
+        <p:nvSpPr>
+          <p:cNvPr id="2" name="Título 1">
+            <a:extLst>
+              <a:ext uri="{FF2B5EF4-FFF2-40B4-BE49-F238E27FC236}">
                 <a16:creationId xmlns:a16="http://schemas.microsoft.com/office/drawing/2014/main" id="{98B7D862-EAF8-F198-8DD4-1A675A260A63}"/>
               </a:ext>
             </a:extLst>
@@ -4621,7 +4870,15 @@
             </a:pPr>
             <a:r>
               <a:rPr lang="es-PE" dirty="0"/>
-              <a:t>Como hemos visto, no solo hemos sido capaces de solucionar el problema respecto a la extracción y registro de los comentarios de los clientes de la empresa, sino que también, les hemos podido brindar una base de datos capaz de mantener una organización mas categórica, una organización la cual, además, puede adaptarse a una banda ancha de datos, y no solo esto, sino que también hemos logrado brindar una visión mas precisa y realista a la empresa de forma global sobre su negocio sin afectar el comprendimiento del sistema para los empleados, comprobando así que el uso de base de datos en empresas puede resolver mas de un solo problema, puede adaptarse a muchas situaciones, tal y como a la que nos afrontamos.</a:t>
+              <a:t>Como hemos visto, no solo hemos sido capaces de solucionar el problema respecto a la extracción y registro de los comentarios de los clientes de la empresa, sino que también, les hemos podido brindar una base de datos capaz de mantener una organización mas categórica, una organización la cual, además, puede adaptarse a una banda ancha de datos a futuro, y no solo esto, sino que también hemos logrado brindar una visión mas precisa y realista a la empresa de forma global sobre su negocio sin afectar el comprendimiento del sistema para los empleados, comprobando así que el uso de base de datos en empresas puede resolver mas de un solo problema, pudiendo adaptarse a muchas situaciones y especialmente </a:t>
+            </a:r>
+            <a:r>
+              <a:rPr lang="es-PE"/>
+              <a:t>la infraestructura </a:t>
+            </a:r>
+            <a:r>
+              <a:rPr lang="es-PE" dirty="0"/>
+              <a:t>tal y como a la que nos afrontamos.</a:t>
             </a:r>
           </a:p>
         </p:txBody>
@@ -5786,6 +6043,1122 @@
   <p:cSld>
     <p:bg>
       <p:bgPr>
+        <a:solidFill>
+          <a:srgbClr val="262626"/>
+        </a:solidFill>
+        <a:effectLst/>
+      </p:bgPr>
+    </p:bg>
+    <p:spTree>
+      <p:nvGrpSpPr>
+        <p:cNvPr id="1" name=""/>
+        <p:cNvGrpSpPr/>
+        <p:nvPr/>
+      </p:nvGrpSpPr>
+      <p:grpSpPr>
+        <a:xfrm>
+          <a:off x="0" y="0"/>
+          <a:ext cx="0" cy="0"/>
+          <a:chOff x="0" y="0"/>
+          <a:chExt cx="0" cy="0"/>
+        </a:xfrm>
+      </p:grpSpPr>
+      <p:cxnSp>
+        <p:nvCxnSpPr>
+          <p:cNvPr id="11" name="Straight Connector 10">
+            <a:extLst>
+              <a:ext uri="{FF2B5EF4-FFF2-40B4-BE49-F238E27FC236}">
+                <a16:creationId xmlns:a16="http://schemas.microsoft.com/office/drawing/2014/main" id="{F64F9B95-9045-48D2-B9F3-2927E98F54AA}"/>
+              </a:ext>
+              <a:ext uri="{C183D7F6-B498-43B3-948B-1728B52AA6E4}">
+                <adec:decorative xmlns:adec="http://schemas.microsoft.com/office/drawing/2017/decorative" val="1"/>
+              </a:ext>
+            </a:extLst>
+          </p:cNvPr>
+          <p:cNvCxnSpPr>
+            <a:cxnSpLocks noGrp="1" noRot="1" noChangeAspect="1" noMove="1" noResize="1" noEditPoints="1" noAdjustHandles="1" noChangeArrowheads="1" noChangeShapeType="1"/>
+          </p:cNvCxnSpPr>
+          <p:nvPr>
+            <p:extLst>
+              <p:ext uri="{386F3935-93C4-4BCD-93E2-E3B085C9AB24}">
+                <p16:designElem xmlns:p16="http://schemas.microsoft.com/office/powerpoint/2015/main" val="1"/>
+              </p:ext>
+            </p:extLst>
+          </p:nvPr>
+        </p:nvCxnSpPr>
+        <p:spPr>
+          <a:xfrm>
+            <a:off x="800100" y="723900"/>
+            <a:ext cx="10591800" cy="0"/>
+          </a:xfrm>
+          <a:prstGeom prst="line">
+            <a:avLst/>
+          </a:prstGeom>
+          <a:ln w="44450">
+            <a:solidFill>
+              <a:schemeClr val="tx1"/>
+            </a:solidFill>
+          </a:ln>
+        </p:spPr>
+        <p:style>
+          <a:lnRef idx="1">
+            <a:schemeClr val="accent1"/>
+          </a:lnRef>
+          <a:fillRef idx="0">
+            <a:schemeClr val="accent1"/>
+          </a:fillRef>
+          <a:effectRef idx="0">
+            <a:schemeClr val="accent1"/>
+          </a:effectRef>
+          <a:fontRef idx="minor">
+            <a:schemeClr val="tx1"/>
+          </a:fontRef>
+        </p:style>
+      </p:cxnSp>
+      <p:cxnSp>
+        <p:nvCxnSpPr>
+          <p:cNvPr id="13" name="Straight Connector 12">
+            <a:extLst>
+              <a:ext uri="{FF2B5EF4-FFF2-40B4-BE49-F238E27FC236}">
+                <a16:creationId xmlns:a16="http://schemas.microsoft.com/office/drawing/2014/main" id="{085AA86F-6A4D-4BCB-A045-D992CDC2959B}"/>
+              </a:ext>
+              <a:ext uri="{C183D7F6-B498-43B3-948B-1728B52AA6E4}">
+                <adec:decorative xmlns:adec="http://schemas.microsoft.com/office/drawing/2017/decorative" val="1"/>
+              </a:ext>
+            </a:extLst>
+          </p:cNvPr>
+          <p:cNvCxnSpPr>
+            <a:cxnSpLocks noGrp="1" noRot="1" noChangeAspect="1" noMove="1" noResize="1" noEditPoints="1" noAdjustHandles="1" noChangeArrowheads="1" noChangeShapeType="1"/>
+          </p:cNvCxnSpPr>
+          <p:nvPr>
+            <p:extLst>
+              <p:ext uri="{386F3935-93C4-4BCD-93E2-E3B085C9AB24}">
+                <p16:designElem xmlns:p16="http://schemas.microsoft.com/office/powerpoint/2015/main" val="1"/>
+              </p:ext>
+            </p:extLst>
+          </p:nvPr>
+        </p:nvCxnSpPr>
+        <p:spPr>
+          <a:xfrm>
+            <a:off x="800100" y="6142781"/>
+            <a:ext cx="10591800" cy="0"/>
+          </a:xfrm>
+          <a:prstGeom prst="line">
+            <a:avLst/>
+          </a:prstGeom>
+          <a:ln w="12700">
+            <a:solidFill>
+              <a:schemeClr val="tx1"/>
+            </a:solidFill>
+          </a:ln>
+        </p:spPr>
+        <p:style>
+          <a:lnRef idx="1">
+            <a:schemeClr val="accent1"/>
+          </a:lnRef>
+          <a:fillRef idx="0">
+            <a:schemeClr val="accent1"/>
+          </a:fillRef>
+          <a:effectRef idx="0">
+            <a:schemeClr val="accent1"/>
+          </a:effectRef>
+          <a:fontRef idx="minor">
+            <a:schemeClr val="tx1"/>
+          </a:fontRef>
+        </p:style>
+      </p:cxnSp>
+      <p:sp useBgFill="1">
+        <p:nvSpPr>
+          <p:cNvPr id="15" name="Rectangle 14">
+            <a:extLst>
+              <a:ext uri="{FF2B5EF4-FFF2-40B4-BE49-F238E27FC236}">
+                <a16:creationId xmlns:a16="http://schemas.microsoft.com/office/drawing/2014/main" id="{E53615EE-C559-4E03-999B-5477F1626FE5}"/>
+              </a:ext>
+              <a:ext uri="{C183D7F6-B498-43B3-948B-1728B52AA6E4}">
+                <adec:decorative xmlns:adec="http://schemas.microsoft.com/office/drawing/2017/decorative" val="1"/>
+              </a:ext>
+            </a:extLst>
+          </p:cNvPr>
+          <p:cNvSpPr>
+            <a:spLocks noGrp="1" noRot="1" noChangeAspect="1" noMove="1" noResize="1" noEditPoints="1" noAdjustHandles="1" noChangeArrowheads="1" noChangeShapeType="1" noTextEdit="1"/>
+          </p:cNvSpPr>
+          <p:nvPr>
+            <p:extLst>
+              <p:ext uri="{386F3935-93C4-4BCD-93E2-E3B085C9AB24}">
+                <p16:designElem xmlns:p16="http://schemas.microsoft.com/office/powerpoint/2015/main" val="1"/>
+              </p:ext>
+            </p:extLst>
+          </p:nvPr>
+        </p:nvSpPr>
+        <p:spPr>
+          <a:xfrm>
+            <a:off x="0" y="0"/>
+            <a:ext cx="12192000" cy="6858000"/>
+          </a:xfrm>
+          <a:prstGeom prst="rect">
+            <a:avLst/>
+          </a:prstGeom>
+          <a:ln w="12700" cap="flat" cmpd="sng" algn="ctr">
+            <a:noFill/>
+            <a:prstDash val="solid"/>
+            <a:miter lim="800000"/>
+          </a:ln>
+          <a:effectLst/>
+          <a:extLst>
+            <a:ext uri="{91240B29-F687-4F45-9708-019B960494DF}">
+              <a14:hiddenLine xmlns:a14="http://schemas.microsoft.com/office/drawing/2010/main" w="12700" cap="flat" cmpd="sng" algn="ctr">
+                <a:solidFill>
+                  <a:schemeClr val="accent1">
+                    <a:shade val="50000"/>
+                  </a:schemeClr>
+                </a:solidFill>
+                <a:prstDash val="solid"/>
+                <a:miter lim="800000"/>
+              </a14:hiddenLine>
+            </a:ext>
+          </a:extLst>
+        </p:spPr>
+        <p:style>
+          <a:lnRef idx="2">
+            <a:schemeClr val="accent1">
+              <a:shade val="50000"/>
+            </a:schemeClr>
+          </a:lnRef>
+          <a:fillRef idx="1">
+            <a:schemeClr val="accent1"/>
+          </a:fillRef>
+          <a:effectRef idx="0">
+            <a:schemeClr val="accent1"/>
+          </a:effectRef>
+          <a:fontRef idx="minor">
+            <a:schemeClr val="lt1"/>
+          </a:fontRef>
+        </p:style>
+        <p:txBody>
+          <a:bodyPr rtlCol="0" anchor="ctr"/>
+          <a:lstStyle/>
+          <a:p>
+            <a:pPr algn="ctr"/>
+            <a:endParaRPr lang="en-US"/>
+          </a:p>
+        </p:txBody>
+      </p:sp>
+      <p:cxnSp>
+        <p:nvCxnSpPr>
+          <p:cNvPr id="17" name="Straight Connector 16">
+            <a:extLst>
+              <a:ext uri="{FF2B5EF4-FFF2-40B4-BE49-F238E27FC236}">
+                <a16:creationId xmlns:a16="http://schemas.microsoft.com/office/drawing/2014/main" id="{799A8EBD-049C-48E6-97ED-C9102D78FC79}"/>
+              </a:ext>
+              <a:ext uri="{C183D7F6-B498-43B3-948B-1728B52AA6E4}">
+                <adec:decorative xmlns:adec="http://schemas.microsoft.com/office/drawing/2017/decorative" val="1"/>
+              </a:ext>
+            </a:extLst>
+          </p:cNvPr>
+          <p:cNvCxnSpPr>
+            <a:cxnSpLocks noGrp="1" noRot="1" noChangeAspect="1" noMove="1" noResize="1" noEditPoints="1" noAdjustHandles="1" noChangeArrowheads="1" noChangeShapeType="1"/>
+          </p:cNvCxnSpPr>
+          <p:nvPr>
+            <p:extLst>
+              <p:ext uri="{386F3935-93C4-4BCD-93E2-E3B085C9AB24}">
+                <p16:designElem xmlns:p16="http://schemas.microsoft.com/office/powerpoint/2015/main" val="1"/>
+              </p:ext>
+            </p:extLst>
+          </p:nvPr>
+        </p:nvCxnSpPr>
+        <p:spPr>
+          <a:xfrm>
+            <a:off x="800100" y="722376"/>
+            <a:ext cx="5715000" cy="0"/>
+          </a:xfrm>
+          <a:prstGeom prst="line">
+            <a:avLst/>
+          </a:prstGeom>
+          <a:ln w="44450">
+            <a:solidFill>
+              <a:schemeClr val="tx1"/>
+            </a:solidFill>
+          </a:ln>
+        </p:spPr>
+        <p:style>
+          <a:lnRef idx="1">
+            <a:schemeClr val="accent1"/>
+          </a:lnRef>
+          <a:fillRef idx="0">
+            <a:schemeClr val="accent1"/>
+          </a:fillRef>
+          <a:effectRef idx="0">
+            <a:schemeClr val="accent1"/>
+          </a:effectRef>
+          <a:fontRef idx="minor">
+            <a:schemeClr val="tx1"/>
+          </a:fontRef>
+        </p:style>
+      </p:cxnSp>
+      <p:sp>
+        <p:nvSpPr>
+          <p:cNvPr id="2" name="CuadroTexto 1">
+            <a:extLst>
+              <a:ext uri="{FF2B5EF4-FFF2-40B4-BE49-F238E27FC236}">
+                <a16:creationId xmlns:a16="http://schemas.microsoft.com/office/drawing/2014/main" id="{30C831BD-6460-EDEB-BE5E-1732359984F6}"/>
+              </a:ext>
+            </a:extLst>
+          </p:cNvPr>
+          <p:cNvSpPr txBox="1"/>
+          <p:nvPr/>
+        </p:nvSpPr>
+        <p:spPr>
+          <a:xfrm>
+            <a:off x="700088" y="2235251"/>
+            <a:ext cx="5958216" cy="3713109"/>
+          </a:xfrm>
+          <a:prstGeom prst="rect">
+            <a:avLst/>
+          </a:prstGeom>
+        </p:spPr>
+        <p:txBody>
+          <a:bodyPr vert="horz" lIns="91440" tIns="45720" rIns="91440" bIns="45720" rtlCol="0">
+            <a:normAutofit/>
+          </a:bodyPr>
+          <a:lstStyle/>
+          <a:p>
+            <a:pPr>
+              <a:lnSpc>
+                <a:spcPct val="110000"/>
+              </a:lnSpc>
+              <a:spcAft>
+                <a:spcPts val="600"/>
+              </a:spcAft>
+            </a:pPr>
+            <a:r>
+              <a:rPr lang="en-US" dirty="0">
+                <a:solidFill>
+                  <a:schemeClr val="bg1"/>
+                </a:solidFill>
+              </a:rPr>
+              <a:t>Pero </a:t>
+            </a:r>
+            <a:r>
+              <a:rPr lang="en-US" dirty="0" err="1">
+                <a:solidFill>
+                  <a:schemeClr val="bg1"/>
+                </a:solidFill>
+              </a:rPr>
+              <a:t>visualizar</a:t>
+            </a:r>
+            <a:r>
+              <a:rPr lang="en-US" dirty="0">
+                <a:solidFill>
+                  <a:schemeClr val="bg1"/>
+                </a:solidFill>
+              </a:rPr>
+              <a:t> las </a:t>
+            </a:r>
+            <a:r>
+              <a:rPr lang="en-US" dirty="0" err="1">
+                <a:solidFill>
+                  <a:schemeClr val="bg1"/>
+                </a:solidFill>
+              </a:rPr>
+              <a:t>tablas</a:t>
+            </a:r>
+            <a:r>
+              <a:rPr lang="en-US" dirty="0">
+                <a:solidFill>
+                  <a:schemeClr val="bg1"/>
+                </a:solidFill>
+              </a:rPr>
+              <a:t> no es </a:t>
+            </a:r>
+            <a:r>
+              <a:rPr lang="en-US" dirty="0" err="1">
+                <a:solidFill>
+                  <a:schemeClr val="bg1"/>
+                </a:solidFill>
+              </a:rPr>
+              <a:t>suficiente</a:t>
+            </a:r>
+            <a:r>
+              <a:rPr lang="en-US" dirty="0">
+                <a:solidFill>
+                  <a:schemeClr val="bg1"/>
+                </a:solidFill>
+              </a:rPr>
+              <a:t> para </a:t>
+            </a:r>
+            <a:r>
+              <a:rPr lang="en-US" dirty="0" err="1">
+                <a:solidFill>
+                  <a:schemeClr val="bg1"/>
+                </a:solidFill>
+              </a:rPr>
+              <a:t>poder</a:t>
+            </a:r>
+            <a:r>
+              <a:rPr lang="en-US" dirty="0">
+                <a:solidFill>
+                  <a:schemeClr val="bg1"/>
+                </a:solidFill>
+              </a:rPr>
+              <a:t> </a:t>
+            </a:r>
+            <a:r>
+              <a:rPr lang="en-US" dirty="0" err="1">
+                <a:solidFill>
+                  <a:schemeClr val="bg1"/>
+                </a:solidFill>
+              </a:rPr>
+              <a:t>detectar</a:t>
+            </a:r>
+            <a:r>
+              <a:rPr lang="en-US" dirty="0">
+                <a:solidFill>
+                  <a:schemeClr val="bg1"/>
+                </a:solidFill>
+              </a:rPr>
+              <a:t> </a:t>
+            </a:r>
+            <a:r>
+              <a:rPr lang="en-US" dirty="0" err="1">
+                <a:solidFill>
+                  <a:schemeClr val="bg1"/>
+                </a:solidFill>
+              </a:rPr>
+              <a:t>los</a:t>
+            </a:r>
+            <a:r>
+              <a:rPr lang="en-US" dirty="0">
+                <a:solidFill>
+                  <a:schemeClr val="bg1"/>
+                </a:solidFill>
+              </a:rPr>
+              <a:t> </a:t>
+            </a:r>
+            <a:r>
+              <a:rPr lang="en-US" dirty="0" err="1">
+                <a:solidFill>
+                  <a:schemeClr val="bg1"/>
+                </a:solidFill>
+              </a:rPr>
+              <a:t>errores</a:t>
+            </a:r>
+            <a:r>
+              <a:rPr lang="en-US" dirty="0">
+                <a:solidFill>
+                  <a:schemeClr val="bg1"/>
+                </a:solidFill>
+              </a:rPr>
+              <a:t> y </a:t>
+            </a:r>
+            <a:r>
+              <a:rPr lang="en-US" dirty="0" err="1">
+                <a:solidFill>
+                  <a:schemeClr val="bg1"/>
+                </a:solidFill>
+              </a:rPr>
+              <a:t>tenerlos</a:t>
+            </a:r>
+            <a:r>
+              <a:rPr lang="en-US" dirty="0">
+                <a:solidFill>
+                  <a:schemeClr val="bg1"/>
+                </a:solidFill>
+              </a:rPr>
+              <a:t> </a:t>
+            </a:r>
+            <a:r>
+              <a:rPr lang="en-US" dirty="0" err="1">
+                <a:solidFill>
+                  <a:schemeClr val="bg1"/>
+                </a:solidFill>
+              </a:rPr>
+              <a:t>marcados</a:t>
+            </a:r>
+            <a:r>
+              <a:rPr lang="en-US" dirty="0">
+                <a:solidFill>
+                  <a:schemeClr val="bg1"/>
+                </a:solidFill>
+              </a:rPr>
+              <a:t>, es </a:t>
+            </a:r>
+            <a:r>
+              <a:rPr lang="en-US" dirty="0" err="1">
+                <a:solidFill>
+                  <a:schemeClr val="bg1"/>
+                </a:solidFill>
+              </a:rPr>
+              <a:t>por</a:t>
+            </a:r>
+            <a:r>
+              <a:rPr lang="en-US" dirty="0">
+                <a:solidFill>
+                  <a:schemeClr val="bg1"/>
+                </a:solidFill>
+              </a:rPr>
+              <a:t> </a:t>
+            </a:r>
+            <a:r>
+              <a:rPr lang="en-US" dirty="0" err="1">
+                <a:solidFill>
+                  <a:schemeClr val="bg1"/>
+                </a:solidFill>
+              </a:rPr>
+              <a:t>ello</a:t>
+            </a:r>
+            <a:r>
+              <a:rPr lang="en-US" dirty="0">
+                <a:solidFill>
+                  <a:schemeClr val="bg1"/>
+                </a:solidFill>
+              </a:rPr>
+              <a:t> </a:t>
+            </a:r>
+            <a:r>
+              <a:rPr lang="en-US" dirty="0" err="1">
+                <a:solidFill>
+                  <a:schemeClr val="bg1"/>
+                </a:solidFill>
+              </a:rPr>
+              <a:t>que</a:t>
+            </a:r>
+            <a:r>
+              <a:rPr lang="en-US" dirty="0">
+                <a:solidFill>
+                  <a:schemeClr val="bg1"/>
+                </a:solidFill>
+              </a:rPr>
+              <a:t> </a:t>
+            </a:r>
+            <a:r>
+              <a:rPr lang="en-US" dirty="0" err="1">
+                <a:solidFill>
+                  <a:schemeClr val="bg1"/>
+                </a:solidFill>
+              </a:rPr>
+              <a:t>en</a:t>
+            </a:r>
+            <a:r>
+              <a:rPr lang="en-US" dirty="0">
+                <a:solidFill>
+                  <a:schemeClr val="bg1"/>
+                </a:solidFill>
+              </a:rPr>
+              <a:t> </a:t>
+            </a:r>
+            <a:r>
+              <a:rPr lang="en-US" dirty="0" err="1">
+                <a:solidFill>
+                  <a:schemeClr val="bg1"/>
+                </a:solidFill>
+              </a:rPr>
+              <a:t>el</a:t>
+            </a:r>
+            <a:r>
+              <a:rPr lang="en-US" dirty="0">
+                <a:solidFill>
+                  <a:schemeClr val="bg1"/>
+                </a:solidFill>
+              </a:rPr>
+              <a:t> </a:t>
+            </a:r>
+            <a:r>
+              <a:rPr lang="en-US" dirty="0" err="1">
+                <a:solidFill>
+                  <a:schemeClr val="bg1"/>
+                </a:solidFill>
+              </a:rPr>
+              <a:t>proceso</a:t>
+            </a:r>
+            <a:r>
+              <a:rPr lang="en-US" dirty="0">
+                <a:solidFill>
+                  <a:schemeClr val="bg1"/>
+                </a:solidFill>
+              </a:rPr>
+              <a:t> del </a:t>
+            </a:r>
+            <a:r>
+              <a:rPr lang="en-US" dirty="0" err="1">
+                <a:solidFill>
+                  <a:schemeClr val="bg1"/>
+                </a:solidFill>
+              </a:rPr>
+              <a:t>análisis</a:t>
+            </a:r>
+            <a:r>
+              <a:rPr lang="en-US" dirty="0">
+                <a:solidFill>
+                  <a:schemeClr val="bg1"/>
+                </a:solidFill>
+              </a:rPr>
+              <a:t>, también </a:t>
+            </a:r>
+            <a:r>
+              <a:rPr lang="en-US" dirty="0" err="1">
+                <a:solidFill>
+                  <a:schemeClr val="bg1"/>
+                </a:solidFill>
+              </a:rPr>
+              <a:t>hicimos</a:t>
+            </a:r>
+            <a:r>
+              <a:rPr lang="en-US" dirty="0">
+                <a:solidFill>
+                  <a:schemeClr val="bg1"/>
+                </a:solidFill>
+              </a:rPr>
+              <a:t> </a:t>
+            </a:r>
+            <a:r>
+              <a:rPr lang="en-US" dirty="0" err="1">
+                <a:solidFill>
+                  <a:schemeClr val="bg1"/>
+                </a:solidFill>
+              </a:rPr>
+              <a:t>usos</a:t>
+            </a:r>
+            <a:r>
+              <a:rPr lang="en-US" dirty="0">
+                <a:solidFill>
+                  <a:schemeClr val="bg1"/>
+                </a:solidFill>
+              </a:rPr>
+              <a:t> de </a:t>
+            </a:r>
+            <a:r>
+              <a:rPr lang="en-US" dirty="0" err="1">
+                <a:solidFill>
+                  <a:schemeClr val="bg1"/>
+                </a:solidFill>
+              </a:rPr>
+              <a:t>figuras</a:t>
+            </a:r>
+            <a:r>
+              <a:rPr lang="en-US" dirty="0">
+                <a:solidFill>
+                  <a:schemeClr val="bg1"/>
+                </a:solidFill>
+              </a:rPr>
+              <a:t> tales </a:t>
+            </a:r>
+            <a:r>
+              <a:rPr lang="en-US" dirty="0" err="1">
+                <a:solidFill>
+                  <a:schemeClr val="bg1"/>
+                </a:solidFill>
+              </a:rPr>
+              <a:t>como</a:t>
+            </a:r>
+            <a:r>
+              <a:rPr lang="en-US" dirty="0">
+                <a:solidFill>
+                  <a:schemeClr val="bg1"/>
+                </a:solidFill>
+              </a:rPr>
+              <a:t> </a:t>
+            </a:r>
+            <a:r>
+              <a:rPr lang="en-US" dirty="0" err="1">
+                <a:solidFill>
+                  <a:schemeClr val="bg1"/>
+                </a:solidFill>
+              </a:rPr>
+              <a:t>diagramas</a:t>
+            </a:r>
+            <a:r>
+              <a:rPr lang="en-US" dirty="0">
+                <a:solidFill>
+                  <a:schemeClr val="bg1"/>
+                </a:solidFill>
+              </a:rPr>
+              <a:t> de Ishikawa y </a:t>
+            </a:r>
+            <a:r>
+              <a:rPr lang="en-US" dirty="0" err="1">
+                <a:solidFill>
+                  <a:schemeClr val="bg1"/>
+                </a:solidFill>
+              </a:rPr>
+              <a:t>arboles</a:t>
+            </a:r>
+            <a:r>
+              <a:rPr lang="en-US" dirty="0">
+                <a:solidFill>
+                  <a:schemeClr val="bg1"/>
+                </a:solidFill>
+              </a:rPr>
+              <a:t> de </a:t>
+            </a:r>
+            <a:r>
+              <a:rPr lang="en-US" dirty="0" err="1">
+                <a:solidFill>
+                  <a:schemeClr val="bg1"/>
+                </a:solidFill>
+              </a:rPr>
+              <a:t>problemas</a:t>
+            </a:r>
+            <a:r>
+              <a:rPr lang="en-US" dirty="0">
+                <a:solidFill>
+                  <a:schemeClr val="bg1"/>
+                </a:solidFill>
+              </a:rPr>
+              <a:t>, no solo para </a:t>
+            </a:r>
+            <a:r>
+              <a:rPr lang="en-US" dirty="0" err="1">
+                <a:solidFill>
+                  <a:schemeClr val="bg1"/>
+                </a:solidFill>
+              </a:rPr>
+              <a:t>tener</a:t>
+            </a:r>
+            <a:r>
+              <a:rPr lang="en-US" dirty="0">
+                <a:solidFill>
+                  <a:schemeClr val="bg1"/>
+                </a:solidFill>
+              </a:rPr>
+              <a:t> </a:t>
+            </a:r>
+            <a:r>
+              <a:rPr lang="en-US" dirty="0" err="1">
+                <a:solidFill>
+                  <a:schemeClr val="bg1"/>
+                </a:solidFill>
+              </a:rPr>
+              <a:t>en</a:t>
+            </a:r>
+            <a:r>
+              <a:rPr lang="en-US" dirty="0">
+                <a:solidFill>
+                  <a:schemeClr val="bg1"/>
+                </a:solidFill>
+              </a:rPr>
+              <a:t> claro </a:t>
+            </a:r>
+            <a:r>
+              <a:rPr lang="en-US" dirty="0" err="1">
+                <a:solidFill>
+                  <a:schemeClr val="bg1"/>
+                </a:solidFill>
+              </a:rPr>
+              <a:t>los</a:t>
+            </a:r>
+            <a:r>
+              <a:rPr lang="en-US" dirty="0">
+                <a:solidFill>
+                  <a:schemeClr val="bg1"/>
+                </a:solidFill>
+              </a:rPr>
+              <a:t> </a:t>
+            </a:r>
+            <a:r>
+              <a:rPr lang="en-US" dirty="0" err="1">
+                <a:solidFill>
+                  <a:schemeClr val="bg1"/>
+                </a:solidFill>
+              </a:rPr>
+              <a:t>problemas</a:t>
+            </a:r>
+            <a:r>
+              <a:rPr lang="en-US" dirty="0">
+                <a:solidFill>
+                  <a:schemeClr val="bg1"/>
+                </a:solidFill>
+              </a:rPr>
+              <a:t> </a:t>
+            </a:r>
+            <a:r>
+              <a:rPr lang="en-US" dirty="0" err="1">
+                <a:solidFill>
+                  <a:schemeClr val="bg1"/>
+                </a:solidFill>
+              </a:rPr>
+              <a:t>en</a:t>
+            </a:r>
+            <a:r>
+              <a:rPr lang="en-US" dirty="0">
+                <a:solidFill>
+                  <a:schemeClr val="bg1"/>
+                </a:solidFill>
+              </a:rPr>
+              <a:t> la </a:t>
+            </a:r>
+            <a:r>
+              <a:rPr lang="en-US" dirty="0" err="1">
+                <a:solidFill>
+                  <a:schemeClr val="bg1"/>
+                </a:solidFill>
+              </a:rPr>
+              <a:t>empresa</a:t>
+            </a:r>
+            <a:r>
+              <a:rPr lang="en-US" dirty="0">
+                <a:solidFill>
+                  <a:schemeClr val="bg1"/>
+                </a:solidFill>
+              </a:rPr>
+              <a:t>, </a:t>
+            </a:r>
+            <a:r>
+              <a:rPr lang="en-US" dirty="0" err="1">
+                <a:solidFill>
+                  <a:schemeClr val="bg1"/>
+                </a:solidFill>
+              </a:rPr>
+              <a:t>sino</a:t>
+            </a:r>
+            <a:r>
+              <a:rPr lang="en-US" dirty="0">
+                <a:solidFill>
+                  <a:schemeClr val="bg1"/>
+                </a:solidFill>
+              </a:rPr>
+              <a:t> también para </a:t>
+            </a:r>
+            <a:r>
+              <a:rPr lang="en-US" dirty="0" err="1">
+                <a:solidFill>
+                  <a:schemeClr val="bg1"/>
+                </a:solidFill>
+              </a:rPr>
+              <a:t>evaluar</a:t>
+            </a:r>
+            <a:r>
+              <a:rPr lang="en-US" dirty="0">
+                <a:solidFill>
+                  <a:schemeClr val="bg1"/>
+                </a:solidFill>
+              </a:rPr>
+              <a:t> </a:t>
+            </a:r>
+            <a:r>
+              <a:rPr lang="en-US" dirty="0" err="1">
+                <a:solidFill>
+                  <a:schemeClr val="bg1"/>
+                </a:solidFill>
+              </a:rPr>
+              <a:t>nuestro</a:t>
+            </a:r>
+            <a:r>
+              <a:rPr lang="en-US" dirty="0">
+                <a:solidFill>
+                  <a:schemeClr val="bg1"/>
+                </a:solidFill>
+              </a:rPr>
+              <a:t> </a:t>
+            </a:r>
+            <a:r>
+              <a:rPr lang="en-US" dirty="0" err="1">
+                <a:solidFill>
+                  <a:schemeClr val="bg1"/>
+                </a:solidFill>
+              </a:rPr>
+              <a:t>comprendimiento</a:t>
+            </a:r>
+            <a:r>
+              <a:rPr lang="en-US" dirty="0">
+                <a:solidFill>
+                  <a:schemeClr val="bg1"/>
+                </a:solidFill>
+              </a:rPr>
+              <a:t> de la </a:t>
+            </a:r>
+            <a:r>
+              <a:rPr lang="en-US" dirty="0" err="1">
+                <a:solidFill>
+                  <a:schemeClr val="bg1"/>
+                </a:solidFill>
+              </a:rPr>
+              <a:t>situacion</a:t>
+            </a:r>
+            <a:r>
+              <a:rPr lang="en-US" dirty="0">
+                <a:solidFill>
+                  <a:schemeClr val="bg1"/>
+                </a:solidFill>
+              </a:rPr>
+              <a:t>, </a:t>
+            </a:r>
+            <a:r>
+              <a:rPr lang="en-US" dirty="0" err="1">
+                <a:solidFill>
+                  <a:schemeClr val="bg1"/>
+                </a:solidFill>
+              </a:rPr>
+              <a:t>cosa</a:t>
+            </a:r>
+            <a:r>
+              <a:rPr lang="en-US" dirty="0">
+                <a:solidFill>
+                  <a:schemeClr val="bg1"/>
+                </a:solidFill>
+              </a:rPr>
+              <a:t> lo </a:t>
+            </a:r>
+            <a:r>
+              <a:rPr lang="en-US" dirty="0" err="1">
+                <a:solidFill>
+                  <a:schemeClr val="bg1"/>
+                </a:solidFill>
+              </a:rPr>
+              <a:t>cual</a:t>
+            </a:r>
+            <a:r>
+              <a:rPr lang="en-US" dirty="0">
+                <a:solidFill>
+                  <a:schemeClr val="bg1"/>
+                </a:solidFill>
+              </a:rPr>
+              <a:t>, </a:t>
+            </a:r>
+            <a:r>
+              <a:rPr lang="en-US" dirty="0" err="1">
+                <a:solidFill>
+                  <a:schemeClr val="bg1"/>
+                </a:solidFill>
+              </a:rPr>
+              <a:t>nos</a:t>
+            </a:r>
+            <a:r>
+              <a:rPr lang="en-US" dirty="0">
+                <a:solidFill>
+                  <a:schemeClr val="bg1"/>
+                </a:solidFill>
+              </a:rPr>
+              <a:t> </a:t>
+            </a:r>
+            <a:r>
+              <a:rPr lang="en-US" dirty="0" err="1">
+                <a:solidFill>
+                  <a:schemeClr val="bg1"/>
+                </a:solidFill>
+              </a:rPr>
+              <a:t>será</a:t>
+            </a:r>
+            <a:r>
+              <a:rPr lang="en-US" dirty="0">
+                <a:solidFill>
+                  <a:schemeClr val="bg1"/>
+                </a:solidFill>
+              </a:rPr>
+              <a:t> </a:t>
+            </a:r>
+            <a:r>
+              <a:rPr lang="en-US" dirty="0" err="1">
+                <a:solidFill>
+                  <a:schemeClr val="bg1"/>
+                </a:solidFill>
+              </a:rPr>
+              <a:t>útil</a:t>
+            </a:r>
+            <a:r>
+              <a:rPr lang="en-US" dirty="0">
+                <a:solidFill>
+                  <a:schemeClr val="bg1"/>
+                </a:solidFill>
+              </a:rPr>
+              <a:t> para </a:t>
+            </a:r>
+            <a:r>
+              <a:rPr lang="en-US" dirty="0" err="1">
+                <a:solidFill>
+                  <a:schemeClr val="bg1"/>
+                </a:solidFill>
+              </a:rPr>
+              <a:t>poder</a:t>
+            </a:r>
+            <a:r>
+              <a:rPr lang="en-US" dirty="0">
+                <a:solidFill>
+                  <a:schemeClr val="bg1"/>
+                </a:solidFill>
+              </a:rPr>
+              <a:t> </a:t>
+            </a:r>
+            <a:r>
+              <a:rPr lang="en-US" dirty="0" err="1">
+                <a:solidFill>
+                  <a:schemeClr val="bg1"/>
+                </a:solidFill>
+              </a:rPr>
+              <a:t>buscar</a:t>
+            </a:r>
+            <a:r>
+              <a:rPr lang="en-US" dirty="0">
+                <a:solidFill>
+                  <a:schemeClr val="bg1"/>
+                </a:solidFill>
+              </a:rPr>
+              <a:t> la </a:t>
+            </a:r>
+            <a:r>
+              <a:rPr lang="en-US" dirty="0" err="1">
+                <a:solidFill>
+                  <a:schemeClr val="bg1"/>
+                </a:solidFill>
+              </a:rPr>
+              <a:t>lógica</a:t>
+            </a:r>
+            <a:r>
+              <a:rPr lang="en-US" dirty="0">
+                <a:solidFill>
+                  <a:schemeClr val="bg1"/>
+                </a:solidFill>
+              </a:rPr>
+              <a:t> de las </a:t>
+            </a:r>
+            <a:r>
+              <a:rPr lang="en-US" dirty="0" err="1">
+                <a:solidFill>
+                  <a:schemeClr val="bg1"/>
+                </a:solidFill>
+              </a:rPr>
+              <a:t>tablas</a:t>
+            </a:r>
+            <a:r>
+              <a:rPr lang="en-US" dirty="0">
+                <a:solidFill>
+                  <a:schemeClr val="bg1"/>
+                </a:solidFill>
+              </a:rPr>
+              <a:t>.</a:t>
+            </a:r>
+          </a:p>
+        </p:txBody>
+      </p:sp>
+      <p:pic>
+        <p:nvPicPr>
+          <p:cNvPr id="4" name="Imagen 3">
+            <a:extLst>
+              <a:ext uri="{FF2B5EF4-FFF2-40B4-BE49-F238E27FC236}">
+                <a16:creationId xmlns:a16="http://schemas.microsoft.com/office/drawing/2014/main" id="{F6135C54-2CA8-70AF-B9EF-5F41A47EB833}"/>
+              </a:ext>
+            </a:extLst>
+          </p:cNvPr>
+          <p:cNvPicPr>
+            <a:picLocks noChangeAspect="1"/>
+          </p:cNvPicPr>
+          <p:nvPr/>
+        </p:nvPicPr>
+        <p:blipFill>
+          <a:blip r:embed="rId2"/>
+          <a:stretch>
+            <a:fillRect/>
+          </a:stretch>
+        </p:blipFill>
+        <p:spPr>
+          <a:xfrm>
+            <a:off x="7315200" y="780164"/>
+            <a:ext cx="4076700" cy="2475138"/>
+          </a:xfrm>
+          <a:prstGeom prst="rect">
+            <a:avLst/>
+          </a:prstGeom>
+        </p:spPr>
+      </p:pic>
+      <p:cxnSp>
+        <p:nvCxnSpPr>
+          <p:cNvPr id="19" name="Straight Connector 18">
+            <a:extLst>
+              <a:ext uri="{FF2B5EF4-FFF2-40B4-BE49-F238E27FC236}">
+                <a16:creationId xmlns:a16="http://schemas.microsoft.com/office/drawing/2014/main" id="{07AB7C5C-C091-4C25-B1BD-93E2F6948C92}"/>
+              </a:ext>
+              <a:ext uri="{C183D7F6-B498-43B3-948B-1728B52AA6E4}">
+                <adec:decorative xmlns:adec="http://schemas.microsoft.com/office/drawing/2017/decorative" val="1"/>
+              </a:ext>
+            </a:extLst>
+          </p:cNvPr>
+          <p:cNvCxnSpPr>
+            <a:cxnSpLocks noGrp="1" noRot="1" noChangeAspect="1" noMove="1" noResize="1" noEditPoints="1" noAdjustHandles="1" noChangeArrowheads="1" noChangeShapeType="1"/>
+          </p:cNvCxnSpPr>
+          <p:nvPr>
+            <p:extLst>
+              <p:ext uri="{386F3935-93C4-4BCD-93E2-E3B085C9AB24}">
+                <p16:designElem xmlns:p16="http://schemas.microsoft.com/office/powerpoint/2015/main" val="1"/>
+              </p:ext>
+            </p:extLst>
+          </p:nvPr>
+        </p:nvCxnSpPr>
+        <p:spPr>
+          <a:xfrm>
+            <a:off x="800100" y="6138546"/>
+            <a:ext cx="5715000" cy="0"/>
+          </a:xfrm>
+          <a:prstGeom prst="line">
+            <a:avLst/>
+          </a:prstGeom>
+          <a:ln w="12700">
+            <a:solidFill>
+              <a:schemeClr val="tx1"/>
+            </a:solidFill>
+          </a:ln>
+        </p:spPr>
+        <p:style>
+          <a:lnRef idx="1">
+            <a:schemeClr val="accent1"/>
+          </a:lnRef>
+          <a:fillRef idx="0">
+            <a:schemeClr val="accent1"/>
+          </a:fillRef>
+          <a:effectRef idx="0">
+            <a:schemeClr val="accent1"/>
+          </a:effectRef>
+          <a:fontRef idx="minor">
+            <a:schemeClr val="tx1"/>
+          </a:fontRef>
+        </p:style>
+      </p:cxnSp>
+      <p:pic>
+        <p:nvPicPr>
+          <p:cNvPr id="6" name="Imagen 5">
+            <a:extLst>
+              <a:ext uri="{FF2B5EF4-FFF2-40B4-BE49-F238E27FC236}">
+                <a16:creationId xmlns:a16="http://schemas.microsoft.com/office/drawing/2014/main" id="{0DAF98CD-5FA2-EC96-8EAF-095FAE3487FF}"/>
+              </a:ext>
+            </a:extLst>
+          </p:cNvPr>
+          <p:cNvPicPr>
+            <a:picLocks noChangeAspect="1"/>
+          </p:cNvPicPr>
+          <p:nvPr/>
+        </p:nvPicPr>
+        <p:blipFill>
+          <a:blip r:embed="rId3"/>
+          <a:stretch>
+            <a:fillRect/>
+          </a:stretch>
+        </p:blipFill>
+        <p:spPr>
+          <a:xfrm>
+            <a:off x="7315200" y="4019609"/>
+            <a:ext cx="4076700" cy="1702022"/>
+          </a:xfrm>
+          <a:prstGeom prst="rect">
+            <a:avLst/>
+          </a:prstGeom>
+        </p:spPr>
+      </p:pic>
+    </p:spTree>
+    <p:extLst>
+      <p:ext uri="{BB962C8B-B14F-4D97-AF65-F5344CB8AC3E}">
+        <p14:creationId xmlns:p14="http://schemas.microsoft.com/office/powerpoint/2010/main" val="3971213820"/>
+      </p:ext>
+    </p:extLst>
+  </p:cSld>
+  <p:clrMapOvr>
+    <a:masterClrMapping/>
+  </p:clrMapOvr>
+</p:sld>
+</file>
+
+<file path=ppt/slides/slide6.xml><?xml version="1.0" encoding="utf-8"?>
+<p:sld xmlns:a="http://schemas.openxmlformats.org/drawingml/2006/main" xmlns:r="http://schemas.openxmlformats.org/officeDocument/2006/relationships" xmlns:p="http://schemas.openxmlformats.org/presentationml/2006/main">
+  <p:cSld>
+    <p:bg>
+      <p:bgPr>
         <a:gradFill>
           <a:gsLst>
             <a:gs pos="0">
@@ -6041,7 +7414,7 @@
 </p:sld>
 </file>
 
-<file path=ppt/slides/slide6.xml><?xml version="1.0" encoding="utf-8"?>
+<file path=ppt/slides/slide7.xml><?xml version="1.0" encoding="utf-8"?>
 <p:sld xmlns:a="http://schemas.openxmlformats.org/drawingml/2006/main" xmlns:r="http://schemas.openxmlformats.org/officeDocument/2006/relationships" xmlns:p="http://schemas.openxmlformats.org/presentationml/2006/main">
   <p:cSld>
     <p:spTree>
@@ -6355,7 +7728,7 @@
 </p:sld>
 </file>
 
-<file path=ppt/slides/slide7.xml><?xml version="1.0" encoding="utf-8"?>
+<file path=ppt/slides/slide8.xml><?xml version="1.0" encoding="utf-8"?>
 <p:sld xmlns:a="http://schemas.openxmlformats.org/drawingml/2006/main" xmlns:r="http://schemas.openxmlformats.org/officeDocument/2006/relationships" xmlns:p="http://schemas.openxmlformats.org/presentationml/2006/main">
   <p:cSld>
     <p:bg>
@@ -6626,7 +7999,7 @@
 </p:sld>
 </file>
 
-<file path=ppt/slides/slide8.xml><?xml version="1.0" encoding="utf-8"?>
+<file path=ppt/slides/slide9.xml><?xml version="1.0" encoding="utf-8"?>
 <p:sld xmlns:a="http://schemas.openxmlformats.org/drawingml/2006/main" xmlns:r="http://schemas.openxmlformats.org/officeDocument/2006/relationships" xmlns:p="http://schemas.openxmlformats.org/presentationml/2006/main">
   <p:cSld>
     <p:bg>
@@ -6803,254 +8176,6 @@
     <p:extLst>
       <p:ext uri="{BB962C8B-B14F-4D97-AF65-F5344CB8AC3E}">
         <p14:creationId xmlns:p14="http://schemas.microsoft.com/office/powerpoint/2010/main" val="2732519687"/>
-      </p:ext>
-    </p:extLst>
-  </p:cSld>
-  <p:clrMapOvr>
-    <a:masterClrMapping/>
-  </p:clrMapOvr>
-</p:sld>
-</file>
-
-<file path=ppt/slides/slide9.xml><?xml version="1.0" encoding="utf-8"?>
-<p:sld xmlns:a="http://schemas.openxmlformats.org/drawingml/2006/main" xmlns:r="http://schemas.openxmlformats.org/officeDocument/2006/relationships" xmlns:p="http://schemas.openxmlformats.org/presentationml/2006/main">
-  <p:cSld>
-    <p:spTree>
-      <p:nvGrpSpPr>
-        <p:cNvPr id="1" name=""/>
-        <p:cNvGrpSpPr/>
-        <p:nvPr/>
-      </p:nvGrpSpPr>
-      <p:grpSpPr>
-        <a:xfrm>
-          <a:off x="0" y="0"/>
-          <a:ext cx="0" cy="0"/>
-          <a:chOff x="0" y="0"/>
-          <a:chExt cx="0" cy="0"/>
-        </a:xfrm>
-      </p:grpSpPr>
-      <p:sp>
-        <p:nvSpPr>
-          <p:cNvPr id="2" name="Título 1">
-            <a:extLst>
-              <a:ext uri="{FF2B5EF4-FFF2-40B4-BE49-F238E27FC236}">
-                <a16:creationId xmlns:a16="http://schemas.microsoft.com/office/drawing/2014/main" id="{B1303390-2115-5FCF-D273-60075D577EC5}"/>
-              </a:ext>
-            </a:extLst>
-          </p:cNvPr>
-          <p:cNvSpPr>
-            <a:spLocks noGrp="1"/>
-          </p:cNvSpPr>
-          <p:nvPr>
-            <p:ph type="title"/>
-          </p:nvPr>
-        </p:nvSpPr>
-        <p:spPr/>
-        <p:txBody>
-          <a:bodyPr>
-            <a:normAutofit fontScale="90000"/>
-          </a:bodyPr>
-          <a:lstStyle/>
-          <a:p>
-            <a:r>
-              <a:rPr lang="es-PE" dirty="0"/>
-              <a:t>Ejemplo de consultas realizadas en la base de datos</a:t>
-            </a:r>
-          </a:p>
-        </p:txBody>
-      </p:sp>
-      <p:sp>
-        <p:nvSpPr>
-          <p:cNvPr id="3" name="Marcador de texto 2">
-            <a:extLst>
-              <a:ext uri="{FF2B5EF4-FFF2-40B4-BE49-F238E27FC236}">
-                <a16:creationId xmlns:a16="http://schemas.microsoft.com/office/drawing/2014/main" id="{41B6E8A9-AC78-69E3-F7EF-EBA8CD86C3DB}"/>
-              </a:ext>
-            </a:extLst>
-          </p:cNvPr>
-          <p:cNvSpPr>
-            <a:spLocks noGrp="1"/>
-          </p:cNvSpPr>
-          <p:nvPr>
-            <p:ph type="body" idx="1"/>
-          </p:nvPr>
-        </p:nvSpPr>
-        <p:spPr>
-          <a:xfrm>
-            <a:off x="704087" y="2085150"/>
-            <a:ext cx="5212080" cy="657225"/>
-          </a:xfrm>
-        </p:spPr>
-        <p:txBody>
-          <a:bodyPr/>
-          <a:lstStyle/>
-          <a:p>
-            <a:r>
-              <a:rPr lang="es-PE" dirty="0"/>
-              <a:t>Consultas</a:t>
-            </a:r>
-          </a:p>
-        </p:txBody>
-      </p:sp>
-      <p:sp>
-        <p:nvSpPr>
-          <p:cNvPr id="5" name="Marcador de texto 4">
-            <a:extLst>
-              <a:ext uri="{FF2B5EF4-FFF2-40B4-BE49-F238E27FC236}">
-                <a16:creationId xmlns:a16="http://schemas.microsoft.com/office/drawing/2014/main" id="{0FA94A5A-0448-A170-98B5-293618846FA5}"/>
-              </a:ext>
-            </a:extLst>
-          </p:cNvPr>
-          <p:cNvSpPr>
-            <a:spLocks noGrp="1"/>
-          </p:cNvSpPr>
-          <p:nvPr>
-            <p:ph type="body" sz="quarter" idx="3"/>
-          </p:nvPr>
-        </p:nvSpPr>
-        <p:spPr>
-          <a:xfrm>
-            <a:off x="6181343" y="2085150"/>
-            <a:ext cx="5212080" cy="657225"/>
-          </a:xfrm>
-        </p:spPr>
-        <p:txBody>
-          <a:bodyPr/>
-          <a:lstStyle/>
-          <a:p>
-            <a:r>
-              <a:rPr lang="es-PE" dirty="0"/>
-              <a:t>Subconsultas</a:t>
-            </a:r>
-          </a:p>
-        </p:txBody>
-      </p:sp>
-      <p:pic>
-        <p:nvPicPr>
-          <p:cNvPr id="7" name="Picture 1">
-            <a:extLst>
-              <a:ext uri="{FF2B5EF4-FFF2-40B4-BE49-F238E27FC236}">
-                <a16:creationId xmlns:a16="http://schemas.microsoft.com/office/drawing/2014/main" id="{0A64C625-E77C-8CA4-A64B-96A4D0975278}"/>
-              </a:ext>
-            </a:extLst>
-          </p:cNvPr>
-          <p:cNvPicPr>
-            <a:picLocks noGrp="1" noChangeAspect="1"/>
-          </p:cNvPicPr>
-          <p:nvPr>
-            <p:ph sz="half" idx="2"/>
-          </p:nvPr>
-        </p:nvPicPr>
-        <p:blipFill>
-          <a:blip r:embed="rId2"/>
-          <a:stretch>
-            <a:fillRect/>
-          </a:stretch>
-        </p:blipFill>
-        <p:spPr>
-          <a:xfrm>
-            <a:off x="704087" y="2758144"/>
-            <a:ext cx="5211763" cy="1357482"/>
-          </a:xfrm>
-          <a:prstGeom prst="rect">
-            <a:avLst/>
-          </a:prstGeom>
-        </p:spPr>
-      </p:pic>
-      <p:pic>
-        <p:nvPicPr>
-          <p:cNvPr id="9" name="Picture 1">
-            <a:extLst>
-              <a:ext uri="{FF2B5EF4-FFF2-40B4-BE49-F238E27FC236}">
-                <a16:creationId xmlns:a16="http://schemas.microsoft.com/office/drawing/2014/main" id="{66E86224-1673-BBBC-B09E-E9538AB8200E}"/>
-              </a:ext>
-            </a:extLst>
-          </p:cNvPr>
-          <p:cNvPicPr>
-            <a:picLocks noChangeAspect="1"/>
-          </p:cNvPicPr>
-          <p:nvPr/>
-        </p:nvPicPr>
-        <p:blipFill>
-          <a:blip r:embed="rId3"/>
-          <a:stretch>
-            <a:fillRect/>
-          </a:stretch>
-        </p:blipFill>
-        <p:spPr>
-          <a:xfrm>
-            <a:off x="704087" y="4235988"/>
-            <a:ext cx="4467225" cy="609600"/>
-          </a:xfrm>
-          <a:prstGeom prst="rect">
-            <a:avLst/>
-          </a:prstGeom>
-        </p:spPr>
-      </p:pic>
-      <p:pic>
-        <p:nvPicPr>
-          <p:cNvPr id="11" name="Picture 1">
-            <a:extLst>
-              <a:ext uri="{FF2B5EF4-FFF2-40B4-BE49-F238E27FC236}">
-                <a16:creationId xmlns:a16="http://schemas.microsoft.com/office/drawing/2014/main" id="{694BFC44-4C9E-D9B8-0259-A10E9E7EEEE6}"/>
-              </a:ext>
-            </a:extLst>
-          </p:cNvPr>
-          <p:cNvPicPr>
-            <a:picLocks noChangeAspect="1"/>
-          </p:cNvPicPr>
-          <p:nvPr/>
-        </p:nvPicPr>
-        <p:blipFill>
-          <a:blip r:embed="rId4"/>
-          <a:stretch>
-            <a:fillRect/>
-          </a:stretch>
-        </p:blipFill>
-        <p:spPr>
-          <a:xfrm>
-            <a:off x="6181343" y="2781474"/>
-            <a:ext cx="5400040" cy="636905"/>
-          </a:xfrm>
-          <a:prstGeom prst="rect">
-            <a:avLst/>
-          </a:prstGeom>
-        </p:spPr>
-      </p:pic>
-      <p:pic>
-        <p:nvPicPr>
-          <p:cNvPr id="16" name="Imagen 15">
-            <a:extLst>
-              <a:ext uri="{FF2B5EF4-FFF2-40B4-BE49-F238E27FC236}">
-                <a16:creationId xmlns:a16="http://schemas.microsoft.com/office/drawing/2014/main" id="{E6504FCE-9A14-782F-BF23-BB9743DC4930}"/>
-              </a:ext>
-            </a:extLst>
-          </p:cNvPr>
-          <p:cNvPicPr>
-            <a:picLocks noChangeAspect="1"/>
-          </p:cNvPicPr>
-          <p:nvPr/>
-        </p:nvPicPr>
-        <p:blipFill>
-          <a:blip r:embed="rId5"/>
-          <a:stretch>
-            <a:fillRect/>
-          </a:stretch>
-        </p:blipFill>
-        <p:spPr>
-          <a:xfrm>
-            <a:off x="6181343" y="3796251"/>
-            <a:ext cx="5211763" cy="744537"/>
-          </a:xfrm>
-          <a:prstGeom prst="rect">
-            <a:avLst/>
-          </a:prstGeom>
-        </p:spPr>
-      </p:pic>
-    </p:spTree>
-    <p:extLst>
-      <p:ext uri="{BB962C8B-B14F-4D97-AF65-F5344CB8AC3E}">
-        <p14:creationId xmlns:p14="http://schemas.microsoft.com/office/powerpoint/2010/main" val="1405469835"/>
       </p:ext>
     </p:extLst>
   </p:cSld>
